--- a/lecons/USA/Settlement Geography/14_USA_SET_L13_Urban_Regions_Millionaire_Cities_Conurbations_and_Megalopoli.pptx
+++ b/lecons/USA/Settlement Geography/14_USA_SET_L13_Urban_Regions_Millionaire_Cities_Conurbations_and_Megalopoli.pptx
@@ -13113,7 +13113,7 @@
               <a:buNone/>
             </a:pPr>
             <a:r>
-              <a:rPr lang="en-US" sz="4000" b="1" dirty="0">
+              <a:rPr lang="en-US" sz="3200" b="1" dirty="0">
                 <a:solidFill>
                   <a:srgbClr val="111111"/>
                 </a:solidFill>
@@ -13123,7 +13123,7 @@
               </a:rPr>
               <a:t>Topic: Urban Settlement and Urbanisation</a:t>
             </a:r>
-            <a:endParaRPr lang="en-US" sz="4000" dirty="0"/>
+            <a:endParaRPr lang="en-US" sz="3200" dirty="0"/>
           </a:p>
           <a:p>
             <a:pPr algn="l" indent="0" marL="0">
@@ -13133,7 +13133,7 @@
               <a:buNone/>
             </a:pPr>
             <a:r>
-              <a:rPr lang="en-US" sz="4000" b="1" dirty="0">
+              <a:rPr lang="en-US" sz="3200" b="1" dirty="0">
                 <a:solidFill>
                   <a:srgbClr val="111111"/>
                 </a:solidFill>
@@ -13143,7 +13143,7 @@
               </a:rPr>
               <a:t>Sub-topic: Urban Growth</a:t>
             </a:r>
-            <a:endParaRPr lang="en-US" sz="4000" dirty="0"/>
+            <a:endParaRPr lang="en-US" sz="3200" dirty="0"/>
           </a:p>
           <a:p>
             <a:pPr algn="l" indent="0" marL="0">
@@ -13153,7 +13153,7 @@
               <a:buNone/>
             </a:pPr>
             <a:r>
-              <a:rPr lang="en-US" sz="4000" b="1" dirty="0">
+              <a:rPr lang="en-US" sz="3200" b="1" dirty="0">
                 <a:solidFill>
                   <a:srgbClr val="990011"/>
                 </a:solidFill>
@@ -13163,7 +13163,7 @@
               </a:rPr>
               <a:t>Lesson 13: Urban Regions: Millionaire Cities, Conurbations and Megalopolis</a:t>
             </a:r>
-            <a:endParaRPr lang="en-US" sz="4000" dirty="0"/>
+            <a:endParaRPr lang="en-US" sz="3200" dirty="0"/>
           </a:p>
         </p:txBody>
       </p:sp>
